--- a/Assets/ChartEditor/Texture/Explanation/ChartEditor説明書.pptx
+++ b/Assets/ChartEditor/Texture/Explanation/ChartEditor説明書.pptx
@@ -5,7 +5,7 @@
     <p:sldMasterId id="2147483757" r:id="rId1"/>
   </p:sldMasterIdLst>
   <p:notesMasterIdLst>
-    <p:notesMasterId r:id="rId25"/>
+    <p:notesMasterId r:id="rId26"/>
   </p:notesMasterIdLst>
   <p:sldIdLst>
     <p:sldId id="256" r:id="rId2"/>
@@ -28,9 +28,10 @@
     <p:sldId id="276" r:id="rId19"/>
     <p:sldId id="277" r:id="rId20"/>
     <p:sldId id="278" r:id="rId21"/>
-    <p:sldId id="268" r:id="rId22"/>
-    <p:sldId id="267" r:id="rId23"/>
-    <p:sldId id="269" r:id="rId24"/>
+    <p:sldId id="279" r:id="rId22"/>
+    <p:sldId id="268" r:id="rId23"/>
+    <p:sldId id="267" r:id="rId24"/>
+    <p:sldId id="269" r:id="rId25"/>
   </p:sldIdLst>
   <p:sldSz cx="12192000" cy="6858000"/>
   <p:notesSz cx="6858000" cy="9144000"/>
@@ -219,7 +220,7 @@
           <a:p>
             <a:fld id="{87488867-1F49-4ED2-BC53-80ABAA1BFAB8}" type="datetimeFigureOut">
               <a:rPr kumimoji="1" lang="ja-JP" altLang="en-US" smtClean="0"/>
-              <a:t>2025/6/22</a:t>
+              <a:t>2025/6/27</a:t>
             </a:fld>
             <a:endParaRPr kumimoji="1" lang="ja-JP" altLang="en-US"/>
           </a:p>
@@ -763,7 +764,7 @@
           <a:p>
             <a:fld id="{B6ABF733-C592-49B8-AED7-787D484AF424}" type="datetime1">
               <a:rPr lang="en-US" altLang="ja-JP" smtClean="0"/>
-              <a:t>6/22/2025</a:t>
+              <a:t>6/27/2025</a:t>
             </a:fld>
             <a:endParaRPr lang="en-US"/>
           </a:p>
@@ -1057,7 +1058,7 @@
           <a:p>
             <a:fld id="{937EACB9-738E-4144-9AB2-B4776ABA0C57}" type="datetime1">
               <a:rPr lang="en-US" altLang="ja-JP" smtClean="0"/>
-              <a:t>6/22/2025</a:t>
+              <a:t>6/27/2025</a:t>
             </a:fld>
             <a:endParaRPr lang="en-US"/>
           </a:p>
@@ -1324,7 +1325,7 @@
           <a:p>
             <a:fld id="{6654F5A4-5181-4A25-AD09-3F3951B86F2C}" type="datetime1">
               <a:rPr lang="en-US" altLang="ja-JP" smtClean="0"/>
-              <a:t>6/22/2025</a:t>
+              <a:t>6/27/2025</a:t>
             </a:fld>
             <a:endParaRPr lang="en-US"/>
           </a:p>
@@ -1596,7 +1597,7 @@
           <a:p>
             <a:fld id="{5A164C96-78C7-43D3-8E91-C55184402C99}" type="datetime1">
               <a:rPr lang="en-US" altLang="ja-JP" smtClean="0"/>
-              <a:t>6/22/2025</a:t>
+              <a:t>6/27/2025</a:t>
             </a:fld>
             <a:endParaRPr lang="en-US"/>
           </a:p>
@@ -1912,7 +1913,7 @@
           <a:p>
             <a:fld id="{C1127390-21FE-4B8B-AEC2-479A9AF6AD66}" type="datetime1">
               <a:rPr lang="en-US" altLang="ja-JP" smtClean="0"/>
-              <a:t>6/22/2025</a:t>
+              <a:t>6/27/2025</a:t>
             </a:fld>
             <a:endParaRPr lang="en-US"/>
           </a:p>
@@ -2278,7 +2279,7 @@
           <a:p>
             <a:fld id="{E1E9C423-32CA-4801-BAD8-E1A04BCFA2CD}" type="datetime1">
               <a:rPr lang="en-US" altLang="ja-JP" smtClean="0"/>
-              <a:t>6/22/2025</a:t>
+              <a:t>6/27/2025</a:t>
             </a:fld>
             <a:endParaRPr lang="en-US"/>
           </a:p>
@@ -2764,7 +2765,7 @@
           <a:p>
             <a:fld id="{DFB80AE2-2ADE-40A0-A4BB-D54CE923CD17}" type="datetime1">
               <a:rPr lang="en-US" altLang="ja-JP" smtClean="0"/>
-              <a:t>6/22/2025</a:t>
+              <a:t>6/27/2025</a:t>
             </a:fld>
             <a:endParaRPr lang="en-US"/>
           </a:p>
@@ -2926,7 +2927,7 @@
           <a:p>
             <a:fld id="{4B79D468-BFF9-4E74-9B7A-2AE35E4A6036}" type="datetime1">
               <a:rPr lang="en-US" altLang="ja-JP" smtClean="0"/>
-              <a:t>6/22/2025</a:t>
+              <a:t>6/27/2025</a:t>
             </a:fld>
             <a:endParaRPr lang="en-US"/>
           </a:p>
@@ -3021,7 +3022,7 @@
           <a:p>
             <a:fld id="{09E26218-A397-4CF7-B1A8-D0189869824F}" type="datetime1">
               <a:rPr lang="en-US" altLang="ja-JP" smtClean="0"/>
-              <a:t>6/22/2025</a:t>
+              <a:t>6/27/2025</a:t>
             </a:fld>
             <a:endParaRPr lang="en-US"/>
           </a:p>
@@ -3431,7 +3432,7 @@
           <a:p>
             <a:fld id="{44803632-12A4-40F6-811F-ADE512AC8326}" type="datetime1">
               <a:rPr lang="en-US" altLang="ja-JP" smtClean="0"/>
-              <a:t>6/22/2025</a:t>
+              <a:t>6/27/2025</a:t>
             </a:fld>
             <a:endParaRPr lang="en-US"/>
           </a:p>
@@ -3720,7 +3721,7 @@
           <a:p>
             <a:fld id="{4BB979C1-20D9-4683-B13F-9D1BED51B5A8}" type="datetime1">
               <a:rPr lang="en-US" altLang="ja-JP" smtClean="0"/>
-              <a:t>6/22/2025</a:t>
+              <a:t>6/27/2025</a:t>
             </a:fld>
             <a:endParaRPr lang="en-US"/>
           </a:p>
@@ -3963,7 +3964,7 @@
           <a:p>
             <a:fld id="{300C673E-D46F-440D-BF05-E961570DF5CF}" type="datetime1">
               <a:rPr lang="en-US" altLang="ja-JP" smtClean="0"/>
-              <a:t>6/22/2025</a:t>
+              <a:t>6/27/2025</a:t>
             </a:fld>
             <a:endParaRPr lang="en-US"/>
           </a:p>
@@ -19675,7 +19676,7 @@
             </a:r>
             <a:r>
               <a:rPr lang="en-US" altLang="ja-JP" dirty="0"/>
-              <a:t>	…7~19</a:t>
+              <a:t>	…7~20</a:t>
             </a:r>
           </a:p>
           <a:p>
@@ -19695,7 +19696,7 @@
             </a:r>
             <a:r>
               <a:rPr lang="en-US" altLang="ja-JP" dirty="0"/>
-              <a:t>	…20</a:t>
+              <a:t>	…21</a:t>
             </a:r>
           </a:p>
           <a:p>
@@ -19715,7 +19716,7 @@
             </a:r>
             <a:r>
               <a:rPr lang="en-US" altLang="ja-JP" dirty="0"/>
-              <a:t>21</a:t>
+              <a:t>22</a:t>
             </a:r>
             <a:endParaRPr kumimoji="1" lang="en-US" altLang="ja-JP" dirty="0"/>
           </a:p>
@@ -19736,7 +19737,7 @@
             </a:r>
             <a:r>
               <a:rPr lang="en-US" altLang="ja-JP" dirty="0"/>
-              <a:t>22</a:t>
+              <a:t>23</a:t>
             </a:r>
             <a:endParaRPr kumimoji="1" lang="en-US" altLang="ja-JP" dirty="0"/>
           </a:p>
@@ -20756,6 +20757,909 @@
 </file>
 
 <file path=ppt/slides/slide21.xml><?xml version="1.0" encoding="utf-8"?>
+<p:sld xmlns:a="http://schemas.openxmlformats.org/drawingml/2006/main" xmlns:r="http://schemas.openxmlformats.org/officeDocument/2006/relationships" xmlns:p="http://schemas.openxmlformats.org/presentationml/2006/main">
+  <p:cSld>
+    <p:spTree>
+      <p:nvGrpSpPr>
+        <p:cNvPr id="1" name="">
+          <a:extLst>
+            <a:ext uri="{FF2B5EF4-FFF2-40B4-BE49-F238E27FC236}">
+              <a16:creationId xmlns:a16="http://schemas.microsoft.com/office/drawing/2014/main" id="{5A6D5243-4853-02B8-57B5-54F221867673}"/>
+            </a:ext>
+          </a:extLst>
+        </p:cNvPr>
+        <p:cNvGrpSpPr/>
+        <p:nvPr/>
+      </p:nvGrpSpPr>
+      <p:grpSpPr>
+        <a:xfrm>
+          <a:off x="0" y="0"/>
+          <a:ext cx="0" cy="0"/>
+          <a:chOff x="0" y="0"/>
+          <a:chExt cx="0" cy="0"/>
+        </a:xfrm>
+      </p:grpSpPr>
+      <p:sp>
+        <p:nvSpPr>
+          <p:cNvPr id="2" name="タイトル 1">
+            <a:extLst>
+              <a:ext uri="{FF2B5EF4-FFF2-40B4-BE49-F238E27FC236}">
+                <a16:creationId xmlns:a16="http://schemas.microsoft.com/office/drawing/2014/main" id="{B027CAFA-D4D2-2B34-9471-063EA7BB94F2}"/>
+              </a:ext>
+            </a:extLst>
+          </p:cNvPr>
+          <p:cNvSpPr>
+            <a:spLocks noGrp="1"/>
+          </p:cNvSpPr>
+          <p:nvPr>
+            <p:ph type="title"/>
+          </p:nvPr>
+        </p:nvSpPr>
+        <p:spPr/>
+        <p:txBody>
+          <a:bodyPr/>
+          <a:lstStyle/>
+          <a:p>
+            <a:r>
+              <a:rPr lang="ja-JP" altLang="en-US" dirty="0"/>
+              <a:t>その他</a:t>
+            </a:r>
+            <a:endParaRPr kumimoji="1" lang="ja-JP" altLang="en-US" dirty="0"/>
+          </a:p>
+        </p:txBody>
+      </p:sp>
+      <p:sp>
+        <p:nvSpPr>
+          <p:cNvPr id="9" name="コンテンツ プレースホルダー 2">
+            <a:extLst>
+              <a:ext uri="{FF2B5EF4-FFF2-40B4-BE49-F238E27FC236}">
+                <a16:creationId xmlns:a16="http://schemas.microsoft.com/office/drawing/2014/main" id="{DB7489DF-C376-02A9-8822-8A4BA4A828EA}"/>
+              </a:ext>
+            </a:extLst>
+          </p:cNvPr>
+          <p:cNvSpPr txBox="1">
+            <a:spLocks/>
+          </p:cNvSpPr>
+          <p:nvPr/>
+        </p:nvSpPr>
+        <p:spPr>
+          <a:xfrm>
+            <a:off x="454191" y="1875696"/>
+            <a:ext cx="4521347" cy="1013799"/>
+          </a:xfrm>
+          <a:prstGeom prst="rect">
+            <a:avLst/>
+          </a:prstGeom>
+        </p:spPr>
+        <p:txBody>
+          <a:bodyPr vert="horz" lIns="91440" tIns="45720" rIns="91440" bIns="45720" rtlCol="0" anchor="ctr">
+            <a:normAutofit/>
+          </a:bodyPr>
+          <a:lstStyle>
+            <a:lvl1pPr marL="306000" indent="-306000" algn="l" defTabSz="457200" rtl="0" eaLnBrk="1" latinLnBrk="0" hangingPunct="1">
+              <a:spcBef>
+                <a:spcPct val="20000"/>
+              </a:spcBef>
+              <a:spcAft>
+                <a:spcPts val="600"/>
+              </a:spcAft>
+              <a:buClr>
+                <a:schemeClr val="accent2"/>
+              </a:buClr>
+              <a:buSzPct val="92000"/>
+              <a:buFont typeface="Wingdings 2" panose="05020102010507070707" pitchFamily="18" charset="2"/>
+              <a:buChar char=""/>
+              <a:defRPr kumimoji="1" sz="1800" kern="1200">
+                <a:solidFill>
+                  <a:schemeClr val="tx2"/>
+                </a:solidFill>
+                <a:latin typeface="+mn-lt"/>
+                <a:ea typeface="+mn-ea"/>
+                <a:cs typeface="+mn-cs"/>
+              </a:defRPr>
+            </a:lvl1pPr>
+            <a:lvl2pPr marL="630000" indent="-306000" algn="l" defTabSz="457200" rtl="0" eaLnBrk="1" latinLnBrk="0" hangingPunct="1">
+              <a:spcBef>
+                <a:spcPct val="20000"/>
+              </a:spcBef>
+              <a:spcAft>
+                <a:spcPts val="600"/>
+              </a:spcAft>
+              <a:buClr>
+                <a:schemeClr val="accent2"/>
+              </a:buClr>
+              <a:buSzPct val="92000"/>
+              <a:buFont typeface="Wingdings 2" panose="05020102010507070707" pitchFamily="18" charset="2"/>
+              <a:buChar char=""/>
+              <a:defRPr kumimoji="1" sz="1600" kern="1200">
+                <a:solidFill>
+                  <a:schemeClr val="tx2"/>
+                </a:solidFill>
+                <a:latin typeface="+mn-lt"/>
+                <a:ea typeface="+mn-ea"/>
+                <a:cs typeface="+mn-cs"/>
+              </a:defRPr>
+            </a:lvl2pPr>
+            <a:lvl3pPr marL="900000" indent="-270000" algn="l" defTabSz="457200" rtl="0" eaLnBrk="1" latinLnBrk="0" hangingPunct="1">
+              <a:spcBef>
+                <a:spcPct val="20000"/>
+              </a:spcBef>
+              <a:spcAft>
+                <a:spcPts val="600"/>
+              </a:spcAft>
+              <a:buClr>
+                <a:schemeClr val="accent2"/>
+              </a:buClr>
+              <a:buSzPct val="92000"/>
+              <a:buFont typeface="Wingdings 2" panose="05020102010507070707" pitchFamily="18" charset="2"/>
+              <a:buChar char=""/>
+              <a:defRPr kumimoji="1" sz="1400" kern="1200">
+                <a:solidFill>
+                  <a:schemeClr val="tx2"/>
+                </a:solidFill>
+                <a:latin typeface="+mn-lt"/>
+                <a:ea typeface="+mn-ea"/>
+                <a:cs typeface="+mn-cs"/>
+              </a:defRPr>
+            </a:lvl3pPr>
+            <a:lvl4pPr marL="1242000" indent="-234000" algn="l" defTabSz="457200" rtl="0" eaLnBrk="1" latinLnBrk="0" hangingPunct="1">
+              <a:spcBef>
+                <a:spcPct val="20000"/>
+              </a:spcBef>
+              <a:spcAft>
+                <a:spcPts val="600"/>
+              </a:spcAft>
+              <a:buClr>
+                <a:schemeClr val="accent2"/>
+              </a:buClr>
+              <a:buSzPct val="92000"/>
+              <a:buFont typeface="Wingdings 2" panose="05020102010507070707" pitchFamily="18" charset="2"/>
+              <a:buChar char=""/>
+              <a:defRPr kumimoji="1" sz="1200" kern="1200">
+                <a:solidFill>
+                  <a:schemeClr val="tx2"/>
+                </a:solidFill>
+                <a:latin typeface="+mn-lt"/>
+                <a:ea typeface="+mn-ea"/>
+                <a:cs typeface="+mn-cs"/>
+              </a:defRPr>
+            </a:lvl4pPr>
+            <a:lvl5pPr marL="1602000" indent="-234000" algn="l" defTabSz="457200" rtl="0" eaLnBrk="1" latinLnBrk="0" hangingPunct="1">
+              <a:spcBef>
+                <a:spcPct val="20000"/>
+              </a:spcBef>
+              <a:spcAft>
+                <a:spcPts val="600"/>
+              </a:spcAft>
+              <a:buClr>
+                <a:schemeClr val="accent2"/>
+              </a:buClr>
+              <a:buSzPct val="92000"/>
+              <a:buFont typeface="Wingdings 2" panose="05020102010507070707" pitchFamily="18" charset="2"/>
+              <a:buChar char=""/>
+              <a:defRPr kumimoji="1" sz="1200" kern="1200">
+                <a:solidFill>
+                  <a:schemeClr val="tx2"/>
+                </a:solidFill>
+                <a:latin typeface="+mn-lt"/>
+                <a:ea typeface="+mn-ea"/>
+                <a:cs typeface="+mn-cs"/>
+              </a:defRPr>
+            </a:lvl5pPr>
+            <a:lvl6pPr marL="1900000" indent="-228600" algn="l" defTabSz="457200" rtl="0" eaLnBrk="1" latinLnBrk="0" hangingPunct="1">
+              <a:spcBef>
+                <a:spcPct val="20000"/>
+              </a:spcBef>
+              <a:spcAft>
+                <a:spcPts val="600"/>
+              </a:spcAft>
+              <a:buClr>
+                <a:schemeClr val="accent2"/>
+              </a:buClr>
+              <a:buSzPct val="92000"/>
+              <a:buFont typeface="Wingdings 2" panose="05020102010507070707" pitchFamily="18" charset="2"/>
+              <a:buChar char=""/>
+              <a:defRPr kumimoji="1" sz="1200" kern="1200">
+                <a:solidFill>
+                  <a:schemeClr val="tx2"/>
+                </a:solidFill>
+                <a:latin typeface="+mn-lt"/>
+                <a:ea typeface="+mn-ea"/>
+                <a:cs typeface="+mn-cs"/>
+              </a:defRPr>
+            </a:lvl6pPr>
+            <a:lvl7pPr marL="2200000" indent="-228600" algn="l" defTabSz="457200" rtl="0" eaLnBrk="1" latinLnBrk="0" hangingPunct="1">
+              <a:spcBef>
+                <a:spcPct val="20000"/>
+              </a:spcBef>
+              <a:spcAft>
+                <a:spcPts val="600"/>
+              </a:spcAft>
+              <a:buClr>
+                <a:schemeClr val="accent2"/>
+              </a:buClr>
+              <a:buSzPct val="92000"/>
+              <a:buFont typeface="Wingdings 2" panose="05020102010507070707" pitchFamily="18" charset="2"/>
+              <a:buChar char=""/>
+              <a:defRPr kumimoji="1" sz="1200" kern="1200">
+                <a:solidFill>
+                  <a:schemeClr val="tx2"/>
+                </a:solidFill>
+                <a:latin typeface="+mn-lt"/>
+                <a:ea typeface="+mn-ea"/>
+                <a:cs typeface="+mn-cs"/>
+              </a:defRPr>
+            </a:lvl7pPr>
+            <a:lvl8pPr marL="2500000" indent="-228600" algn="l" defTabSz="457200" rtl="0" eaLnBrk="1" latinLnBrk="0" hangingPunct="1">
+              <a:spcBef>
+                <a:spcPct val="20000"/>
+              </a:spcBef>
+              <a:spcAft>
+                <a:spcPts val="600"/>
+              </a:spcAft>
+              <a:buClr>
+                <a:schemeClr val="accent2"/>
+              </a:buClr>
+              <a:buSzPct val="92000"/>
+              <a:buFont typeface="Wingdings 2" panose="05020102010507070707" pitchFamily="18" charset="2"/>
+              <a:buChar char=""/>
+              <a:defRPr kumimoji="1" sz="1200" kern="1200">
+                <a:solidFill>
+                  <a:schemeClr val="tx2"/>
+                </a:solidFill>
+                <a:latin typeface="+mn-lt"/>
+                <a:ea typeface="+mn-ea"/>
+                <a:cs typeface="+mn-cs"/>
+              </a:defRPr>
+            </a:lvl8pPr>
+            <a:lvl9pPr marL="2800000" indent="-228600" algn="l" defTabSz="457200" rtl="0" eaLnBrk="1" latinLnBrk="0" hangingPunct="1">
+              <a:spcBef>
+                <a:spcPct val="20000"/>
+              </a:spcBef>
+              <a:spcAft>
+                <a:spcPts val="600"/>
+              </a:spcAft>
+              <a:buClr>
+                <a:schemeClr val="accent2"/>
+              </a:buClr>
+              <a:buSzPct val="92000"/>
+              <a:buFont typeface="Wingdings 2" panose="05020102010507070707" pitchFamily="18" charset="2"/>
+              <a:buChar char=""/>
+              <a:defRPr kumimoji="1" sz="1200" kern="1200">
+                <a:solidFill>
+                  <a:schemeClr val="tx2"/>
+                </a:solidFill>
+                <a:latin typeface="+mn-lt"/>
+                <a:ea typeface="+mn-ea"/>
+                <a:cs typeface="+mn-cs"/>
+              </a:defRPr>
+            </a:lvl9pPr>
+          </a:lstStyle>
+          <a:p>
+            <a:r>
+              <a:rPr lang="ja-JP" altLang="en-US" dirty="0"/>
+              <a:t>頂点データをコピー、ペーストします。</a:t>
+            </a:r>
+            <a:endParaRPr lang="en-US" altLang="ja-JP" dirty="0"/>
+          </a:p>
+        </p:txBody>
+      </p:sp>
+      <p:sp>
+        <p:nvSpPr>
+          <p:cNvPr id="21" name="スライド番号プレースホルダー 20">
+            <a:extLst>
+              <a:ext uri="{FF2B5EF4-FFF2-40B4-BE49-F238E27FC236}">
+                <a16:creationId xmlns:a16="http://schemas.microsoft.com/office/drawing/2014/main" id="{A3E4D867-CBE7-29A1-AC9E-E69E8A75D3BF}"/>
+              </a:ext>
+            </a:extLst>
+          </p:cNvPr>
+          <p:cNvSpPr>
+            <a:spLocks noGrp="1"/>
+          </p:cNvSpPr>
+          <p:nvPr>
+            <p:ph type="sldNum" sz="quarter" idx="12"/>
+          </p:nvPr>
+        </p:nvSpPr>
+        <p:spPr/>
+        <p:txBody>
+          <a:bodyPr/>
+          <a:lstStyle/>
+          <a:p>
+            <a:fld id="{CC057153-B650-4DEB-B370-79DDCFDCE934}" type="slidenum">
+              <a:rPr lang="en-US" smtClean="0"/>
+              <a:t>20</a:t>
+            </a:fld>
+            <a:endParaRPr lang="en-US"/>
+          </a:p>
+        </p:txBody>
+      </p:sp>
+      <p:pic>
+        <p:nvPicPr>
+          <p:cNvPr id="7" name="図 6">
+            <a:extLst>
+              <a:ext uri="{FF2B5EF4-FFF2-40B4-BE49-F238E27FC236}">
+                <a16:creationId xmlns:a16="http://schemas.microsoft.com/office/drawing/2014/main" id="{47F7D0F8-B1D9-4066-CF25-653946615CC8}"/>
+              </a:ext>
+            </a:extLst>
+          </p:cNvPr>
+          <p:cNvPicPr>
+            <a:picLocks noChangeAspect="1"/>
+          </p:cNvPicPr>
+          <p:nvPr/>
+        </p:nvPicPr>
+        <p:blipFill>
+          <a:blip r:embed="rId2">
+            <a:alphaModFix amt="20000"/>
+          </a:blip>
+          <a:srcRect l="15517" t="15088" r="8799" b="10924"/>
+          <a:stretch>
+            <a:fillRect/>
+          </a:stretch>
+        </p:blipFill>
+        <p:spPr>
+          <a:xfrm>
+            <a:off x="9698113" y="1347761"/>
+            <a:ext cx="586920" cy="368195"/>
+          </a:xfrm>
+          <a:prstGeom prst="rect">
+            <a:avLst/>
+          </a:prstGeom>
+        </p:spPr>
+      </p:pic>
+      <p:pic>
+        <p:nvPicPr>
+          <p:cNvPr id="8" name="図 7">
+            <a:extLst>
+              <a:ext uri="{FF2B5EF4-FFF2-40B4-BE49-F238E27FC236}">
+                <a16:creationId xmlns:a16="http://schemas.microsoft.com/office/drawing/2014/main" id="{1AF56A57-3417-A072-A32E-5632A885A264}"/>
+              </a:ext>
+            </a:extLst>
+          </p:cNvPr>
+          <p:cNvPicPr>
+            <a:picLocks noChangeAspect="1"/>
+          </p:cNvPicPr>
+          <p:nvPr/>
+        </p:nvPicPr>
+        <p:blipFill>
+          <a:blip r:embed="rId3">
+            <a:alphaModFix amt="20000"/>
+          </a:blip>
+          <a:srcRect l="16711" t="10754" r="9461" b="15257"/>
+          <a:stretch>
+            <a:fillRect/>
+          </a:stretch>
+        </p:blipFill>
+        <p:spPr>
+          <a:xfrm>
+            <a:off x="10358589" y="1347761"/>
+            <a:ext cx="586920" cy="368195"/>
+          </a:xfrm>
+          <a:prstGeom prst="rect">
+            <a:avLst/>
+          </a:prstGeom>
+        </p:spPr>
+      </p:pic>
+      <p:pic>
+        <p:nvPicPr>
+          <p:cNvPr id="16" name="図 15">
+            <a:extLst>
+              <a:ext uri="{FF2B5EF4-FFF2-40B4-BE49-F238E27FC236}">
+                <a16:creationId xmlns:a16="http://schemas.microsoft.com/office/drawing/2014/main" id="{E7A74462-52BF-E96D-67CE-69450CCC1FE7}"/>
+              </a:ext>
+            </a:extLst>
+          </p:cNvPr>
+          <p:cNvPicPr>
+            <a:picLocks noChangeAspect="1"/>
+          </p:cNvPicPr>
+          <p:nvPr/>
+        </p:nvPicPr>
+        <p:blipFill>
+          <a:blip r:embed="rId4">
+            <a:alphaModFix/>
+          </a:blip>
+          <a:srcRect l="15833" t="11995" r="9732" b="15257"/>
+          <a:stretch>
+            <a:fillRect/>
+          </a:stretch>
+        </p:blipFill>
+        <p:spPr>
+          <a:xfrm>
+            <a:off x="11019065" y="1347761"/>
+            <a:ext cx="591743" cy="368195"/>
+          </a:xfrm>
+          <a:prstGeom prst="rect">
+            <a:avLst/>
+          </a:prstGeom>
+        </p:spPr>
+      </p:pic>
+      <p:sp>
+        <p:nvSpPr>
+          <p:cNvPr id="3" name="コンテンツ プレースホルダー 2">
+            <a:extLst>
+              <a:ext uri="{FF2B5EF4-FFF2-40B4-BE49-F238E27FC236}">
+                <a16:creationId xmlns:a16="http://schemas.microsoft.com/office/drawing/2014/main" id="{05A18C3A-CED9-3B07-0910-520001479414}"/>
+              </a:ext>
+            </a:extLst>
+          </p:cNvPr>
+          <p:cNvSpPr txBox="1">
+            <a:spLocks/>
+          </p:cNvSpPr>
+          <p:nvPr/>
+        </p:nvSpPr>
+        <p:spPr>
+          <a:xfrm>
+            <a:off x="6096000" y="1875696"/>
+            <a:ext cx="4521347" cy="1013799"/>
+          </a:xfrm>
+          <a:prstGeom prst="rect">
+            <a:avLst/>
+          </a:prstGeom>
+        </p:spPr>
+        <p:txBody>
+          <a:bodyPr vert="horz" lIns="91440" tIns="45720" rIns="91440" bIns="45720" rtlCol="0" anchor="ctr">
+            <a:normAutofit/>
+          </a:bodyPr>
+          <a:lstStyle>
+            <a:lvl1pPr marL="306000" indent="-306000" algn="l" defTabSz="457200" rtl="0" eaLnBrk="1" latinLnBrk="0" hangingPunct="1">
+              <a:spcBef>
+                <a:spcPct val="20000"/>
+              </a:spcBef>
+              <a:spcAft>
+                <a:spcPts val="600"/>
+              </a:spcAft>
+              <a:buClr>
+                <a:schemeClr val="accent2"/>
+              </a:buClr>
+              <a:buSzPct val="92000"/>
+              <a:buFont typeface="Wingdings 2" panose="05020102010507070707" pitchFamily="18" charset="2"/>
+              <a:buChar char=""/>
+              <a:defRPr kumimoji="1" sz="1800" kern="1200">
+                <a:solidFill>
+                  <a:schemeClr val="tx2"/>
+                </a:solidFill>
+                <a:latin typeface="+mn-lt"/>
+                <a:ea typeface="+mn-ea"/>
+                <a:cs typeface="+mn-cs"/>
+              </a:defRPr>
+            </a:lvl1pPr>
+            <a:lvl2pPr marL="630000" indent="-306000" algn="l" defTabSz="457200" rtl="0" eaLnBrk="1" latinLnBrk="0" hangingPunct="1">
+              <a:spcBef>
+                <a:spcPct val="20000"/>
+              </a:spcBef>
+              <a:spcAft>
+                <a:spcPts val="600"/>
+              </a:spcAft>
+              <a:buClr>
+                <a:schemeClr val="accent2"/>
+              </a:buClr>
+              <a:buSzPct val="92000"/>
+              <a:buFont typeface="Wingdings 2" panose="05020102010507070707" pitchFamily="18" charset="2"/>
+              <a:buChar char=""/>
+              <a:defRPr kumimoji="1" sz="1600" kern="1200">
+                <a:solidFill>
+                  <a:schemeClr val="tx2"/>
+                </a:solidFill>
+                <a:latin typeface="+mn-lt"/>
+                <a:ea typeface="+mn-ea"/>
+                <a:cs typeface="+mn-cs"/>
+              </a:defRPr>
+            </a:lvl2pPr>
+            <a:lvl3pPr marL="900000" indent="-270000" algn="l" defTabSz="457200" rtl="0" eaLnBrk="1" latinLnBrk="0" hangingPunct="1">
+              <a:spcBef>
+                <a:spcPct val="20000"/>
+              </a:spcBef>
+              <a:spcAft>
+                <a:spcPts val="600"/>
+              </a:spcAft>
+              <a:buClr>
+                <a:schemeClr val="accent2"/>
+              </a:buClr>
+              <a:buSzPct val="92000"/>
+              <a:buFont typeface="Wingdings 2" panose="05020102010507070707" pitchFamily="18" charset="2"/>
+              <a:buChar char=""/>
+              <a:defRPr kumimoji="1" sz="1400" kern="1200">
+                <a:solidFill>
+                  <a:schemeClr val="tx2"/>
+                </a:solidFill>
+                <a:latin typeface="+mn-lt"/>
+                <a:ea typeface="+mn-ea"/>
+                <a:cs typeface="+mn-cs"/>
+              </a:defRPr>
+            </a:lvl3pPr>
+            <a:lvl4pPr marL="1242000" indent="-234000" algn="l" defTabSz="457200" rtl="0" eaLnBrk="1" latinLnBrk="0" hangingPunct="1">
+              <a:spcBef>
+                <a:spcPct val="20000"/>
+              </a:spcBef>
+              <a:spcAft>
+                <a:spcPts val="600"/>
+              </a:spcAft>
+              <a:buClr>
+                <a:schemeClr val="accent2"/>
+              </a:buClr>
+              <a:buSzPct val="92000"/>
+              <a:buFont typeface="Wingdings 2" panose="05020102010507070707" pitchFamily="18" charset="2"/>
+              <a:buChar char=""/>
+              <a:defRPr kumimoji="1" sz="1200" kern="1200">
+                <a:solidFill>
+                  <a:schemeClr val="tx2"/>
+                </a:solidFill>
+                <a:latin typeface="+mn-lt"/>
+                <a:ea typeface="+mn-ea"/>
+                <a:cs typeface="+mn-cs"/>
+              </a:defRPr>
+            </a:lvl4pPr>
+            <a:lvl5pPr marL="1602000" indent="-234000" algn="l" defTabSz="457200" rtl="0" eaLnBrk="1" latinLnBrk="0" hangingPunct="1">
+              <a:spcBef>
+                <a:spcPct val="20000"/>
+              </a:spcBef>
+              <a:spcAft>
+                <a:spcPts val="600"/>
+              </a:spcAft>
+              <a:buClr>
+                <a:schemeClr val="accent2"/>
+              </a:buClr>
+              <a:buSzPct val="92000"/>
+              <a:buFont typeface="Wingdings 2" panose="05020102010507070707" pitchFamily="18" charset="2"/>
+              <a:buChar char=""/>
+              <a:defRPr kumimoji="1" sz="1200" kern="1200">
+                <a:solidFill>
+                  <a:schemeClr val="tx2"/>
+                </a:solidFill>
+                <a:latin typeface="+mn-lt"/>
+                <a:ea typeface="+mn-ea"/>
+                <a:cs typeface="+mn-cs"/>
+              </a:defRPr>
+            </a:lvl5pPr>
+            <a:lvl6pPr marL="1900000" indent="-228600" algn="l" defTabSz="457200" rtl="0" eaLnBrk="1" latinLnBrk="0" hangingPunct="1">
+              <a:spcBef>
+                <a:spcPct val="20000"/>
+              </a:spcBef>
+              <a:spcAft>
+                <a:spcPts val="600"/>
+              </a:spcAft>
+              <a:buClr>
+                <a:schemeClr val="accent2"/>
+              </a:buClr>
+              <a:buSzPct val="92000"/>
+              <a:buFont typeface="Wingdings 2" panose="05020102010507070707" pitchFamily="18" charset="2"/>
+              <a:buChar char=""/>
+              <a:defRPr kumimoji="1" sz="1200" kern="1200">
+                <a:solidFill>
+                  <a:schemeClr val="tx2"/>
+                </a:solidFill>
+                <a:latin typeface="+mn-lt"/>
+                <a:ea typeface="+mn-ea"/>
+                <a:cs typeface="+mn-cs"/>
+              </a:defRPr>
+            </a:lvl6pPr>
+            <a:lvl7pPr marL="2200000" indent="-228600" algn="l" defTabSz="457200" rtl="0" eaLnBrk="1" latinLnBrk="0" hangingPunct="1">
+              <a:spcBef>
+                <a:spcPct val="20000"/>
+              </a:spcBef>
+              <a:spcAft>
+                <a:spcPts val="600"/>
+              </a:spcAft>
+              <a:buClr>
+                <a:schemeClr val="accent2"/>
+              </a:buClr>
+              <a:buSzPct val="92000"/>
+              <a:buFont typeface="Wingdings 2" panose="05020102010507070707" pitchFamily="18" charset="2"/>
+              <a:buChar char=""/>
+              <a:defRPr kumimoji="1" sz="1200" kern="1200">
+                <a:solidFill>
+                  <a:schemeClr val="tx2"/>
+                </a:solidFill>
+                <a:latin typeface="+mn-lt"/>
+                <a:ea typeface="+mn-ea"/>
+                <a:cs typeface="+mn-cs"/>
+              </a:defRPr>
+            </a:lvl7pPr>
+            <a:lvl8pPr marL="2500000" indent="-228600" algn="l" defTabSz="457200" rtl="0" eaLnBrk="1" latinLnBrk="0" hangingPunct="1">
+              <a:spcBef>
+                <a:spcPct val="20000"/>
+              </a:spcBef>
+              <a:spcAft>
+                <a:spcPts val="600"/>
+              </a:spcAft>
+              <a:buClr>
+                <a:schemeClr val="accent2"/>
+              </a:buClr>
+              <a:buSzPct val="92000"/>
+              <a:buFont typeface="Wingdings 2" panose="05020102010507070707" pitchFamily="18" charset="2"/>
+              <a:buChar char=""/>
+              <a:defRPr kumimoji="1" sz="1200" kern="1200">
+                <a:solidFill>
+                  <a:schemeClr val="tx2"/>
+                </a:solidFill>
+                <a:latin typeface="+mn-lt"/>
+                <a:ea typeface="+mn-ea"/>
+                <a:cs typeface="+mn-cs"/>
+              </a:defRPr>
+            </a:lvl8pPr>
+            <a:lvl9pPr marL="2800000" indent="-228600" algn="l" defTabSz="457200" rtl="0" eaLnBrk="1" latinLnBrk="0" hangingPunct="1">
+              <a:spcBef>
+                <a:spcPct val="20000"/>
+              </a:spcBef>
+              <a:spcAft>
+                <a:spcPts val="600"/>
+              </a:spcAft>
+              <a:buClr>
+                <a:schemeClr val="accent2"/>
+              </a:buClr>
+              <a:buSzPct val="92000"/>
+              <a:buFont typeface="Wingdings 2" panose="05020102010507070707" pitchFamily="18" charset="2"/>
+              <a:buChar char=""/>
+              <a:defRPr kumimoji="1" sz="1200" kern="1200">
+                <a:solidFill>
+                  <a:schemeClr val="tx2"/>
+                </a:solidFill>
+                <a:latin typeface="+mn-lt"/>
+                <a:ea typeface="+mn-ea"/>
+                <a:cs typeface="+mn-cs"/>
+              </a:defRPr>
+            </a:lvl9pPr>
+          </a:lstStyle>
+          <a:p>
+            <a:r>
+              <a:rPr lang="ja-JP" altLang="en-US" dirty="0"/>
+              <a:t>頂点データを反転します。</a:t>
+            </a:r>
+            <a:endParaRPr lang="en-US" altLang="ja-JP" dirty="0"/>
+          </a:p>
+        </p:txBody>
+      </p:sp>
+      <p:sp>
+        <p:nvSpPr>
+          <p:cNvPr id="4" name="コンテンツ プレースホルダー 2">
+            <a:extLst>
+              <a:ext uri="{FF2B5EF4-FFF2-40B4-BE49-F238E27FC236}">
+                <a16:creationId xmlns:a16="http://schemas.microsoft.com/office/drawing/2014/main" id="{CA9F038A-55AC-9AAD-512A-3AB0A745DF2C}"/>
+              </a:ext>
+            </a:extLst>
+          </p:cNvPr>
+          <p:cNvSpPr txBox="1">
+            <a:spLocks/>
+          </p:cNvSpPr>
+          <p:nvPr/>
+        </p:nvSpPr>
+        <p:spPr>
+          <a:xfrm>
+            <a:off x="581192" y="2604465"/>
+            <a:ext cx="4521347" cy="570059"/>
+          </a:xfrm>
+          <a:prstGeom prst="rect">
+            <a:avLst/>
+          </a:prstGeom>
+        </p:spPr>
+        <p:txBody>
+          <a:bodyPr vert="horz" lIns="91440" tIns="45720" rIns="91440" bIns="45720" rtlCol="0" anchor="ctr">
+            <a:normAutofit/>
+          </a:bodyPr>
+          <a:lstStyle>
+            <a:lvl1pPr marL="306000" indent="-306000" algn="l" defTabSz="457200" rtl="0" eaLnBrk="1" latinLnBrk="0" hangingPunct="1">
+              <a:spcBef>
+                <a:spcPct val="20000"/>
+              </a:spcBef>
+              <a:spcAft>
+                <a:spcPts val="600"/>
+              </a:spcAft>
+              <a:buClr>
+                <a:schemeClr val="accent2"/>
+              </a:buClr>
+              <a:buSzPct val="92000"/>
+              <a:buFont typeface="Wingdings 2" panose="05020102010507070707" pitchFamily="18" charset="2"/>
+              <a:buChar char=""/>
+              <a:defRPr kumimoji="1" sz="1800" kern="1200">
+                <a:solidFill>
+                  <a:schemeClr val="tx2"/>
+                </a:solidFill>
+                <a:latin typeface="+mn-lt"/>
+                <a:ea typeface="+mn-ea"/>
+                <a:cs typeface="+mn-cs"/>
+              </a:defRPr>
+            </a:lvl1pPr>
+            <a:lvl2pPr marL="630000" indent="-306000" algn="l" defTabSz="457200" rtl="0" eaLnBrk="1" latinLnBrk="0" hangingPunct="1">
+              <a:spcBef>
+                <a:spcPct val="20000"/>
+              </a:spcBef>
+              <a:spcAft>
+                <a:spcPts val="600"/>
+              </a:spcAft>
+              <a:buClr>
+                <a:schemeClr val="accent2"/>
+              </a:buClr>
+              <a:buSzPct val="92000"/>
+              <a:buFont typeface="Wingdings 2" panose="05020102010507070707" pitchFamily="18" charset="2"/>
+              <a:buChar char=""/>
+              <a:defRPr kumimoji="1" sz="1600" kern="1200">
+                <a:solidFill>
+                  <a:schemeClr val="tx2"/>
+                </a:solidFill>
+                <a:latin typeface="+mn-lt"/>
+                <a:ea typeface="+mn-ea"/>
+                <a:cs typeface="+mn-cs"/>
+              </a:defRPr>
+            </a:lvl2pPr>
+            <a:lvl3pPr marL="900000" indent="-270000" algn="l" defTabSz="457200" rtl="0" eaLnBrk="1" latinLnBrk="0" hangingPunct="1">
+              <a:spcBef>
+                <a:spcPct val="20000"/>
+              </a:spcBef>
+              <a:spcAft>
+                <a:spcPts val="600"/>
+              </a:spcAft>
+              <a:buClr>
+                <a:schemeClr val="accent2"/>
+              </a:buClr>
+              <a:buSzPct val="92000"/>
+              <a:buFont typeface="Wingdings 2" panose="05020102010507070707" pitchFamily="18" charset="2"/>
+              <a:buChar char=""/>
+              <a:defRPr kumimoji="1" sz="1400" kern="1200">
+                <a:solidFill>
+                  <a:schemeClr val="tx2"/>
+                </a:solidFill>
+                <a:latin typeface="+mn-lt"/>
+                <a:ea typeface="+mn-ea"/>
+                <a:cs typeface="+mn-cs"/>
+              </a:defRPr>
+            </a:lvl3pPr>
+            <a:lvl4pPr marL="1242000" indent="-234000" algn="l" defTabSz="457200" rtl="0" eaLnBrk="1" latinLnBrk="0" hangingPunct="1">
+              <a:spcBef>
+                <a:spcPct val="20000"/>
+              </a:spcBef>
+              <a:spcAft>
+                <a:spcPts val="600"/>
+              </a:spcAft>
+              <a:buClr>
+                <a:schemeClr val="accent2"/>
+              </a:buClr>
+              <a:buSzPct val="92000"/>
+              <a:buFont typeface="Wingdings 2" panose="05020102010507070707" pitchFamily="18" charset="2"/>
+              <a:buChar char=""/>
+              <a:defRPr kumimoji="1" sz="1200" kern="1200">
+                <a:solidFill>
+                  <a:schemeClr val="tx2"/>
+                </a:solidFill>
+                <a:latin typeface="+mn-lt"/>
+                <a:ea typeface="+mn-ea"/>
+                <a:cs typeface="+mn-cs"/>
+              </a:defRPr>
+            </a:lvl4pPr>
+            <a:lvl5pPr marL="1602000" indent="-234000" algn="l" defTabSz="457200" rtl="0" eaLnBrk="1" latinLnBrk="0" hangingPunct="1">
+              <a:spcBef>
+                <a:spcPct val="20000"/>
+              </a:spcBef>
+              <a:spcAft>
+                <a:spcPts val="600"/>
+              </a:spcAft>
+              <a:buClr>
+                <a:schemeClr val="accent2"/>
+              </a:buClr>
+              <a:buSzPct val="92000"/>
+              <a:buFont typeface="Wingdings 2" panose="05020102010507070707" pitchFamily="18" charset="2"/>
+              <a:buChar char=""/>
+              <a:defRPr kumimoji="1" sz="1200" kern="1200">
+                <a:solidFill>
+                  <a:schemeClr val="tx2"/>
+                </a:solidFill>
+                <a:latin typeface="+mn-lt"/>
+                <a:ea typeface="+mn-ea"/>
+                <a:cs typeface="+mn-cs"/>
+              </a:defRPr>
+            </a:lvl5pPr>
+            <a:lvl6pPr marL="1900000" indent="-228600" algn="l" defTabSz="457200" rtl="0" eaLnBrk="1" latinLnBrk="0" hangingPunct="1">
+              <a:spcBef>
+                <a:spcPct val="20000"/>
+              </a:spcBef>
+              <a:spcAft>
+                <a:spcPts val="600"/>
+              </a:spcAft>
+              <a:buClr>
+                <a:schemeClr val="accent2"/>
+              </a:buClr>
+              <a:buSzPct val="92000"/>
+              <a:buFont typeface="Wingdings 2" panose="05020102010507070707" pitchFamily="18" charset="2"/>
+              <a:buChar char=""/>
+              <a:defRPr kumimoji="1" sz="1200" kern="1200">
+                <a:solidFill>
+                  <a:schemeClr val="tx2"/>
+                </a:solidFill>
+                <a:latin typeface="+mn-lt"/>
+                <a:ea typeface="+mn-ea"/>
+                <a:cs typeface="+mn-cs"/>
+              </a:defRPr>
+            </a:lvl6pPr>
+            <a:lvl7pPr marL="2200000" indent="-228600" algn="l" defTabSz="457200" rtl="0" eaLnBrk="1" latinLnBrk="0" hangingPunct="1">
+              <a:spcBef>
+                <a:spcPct val="20000"/>
+              </a:spcBef>
+              <a:spcAft>
+                <a:spcPts val="600"/>
+              </a:spcAft>
+              <a:buClr>
+                <a:schemeClr val="accent2"/>
+              </a:buClr>
+              <a:buSzPct val="92000"/>
+              <a:buFont typeface="Wingdings 2" panose="05020102010507070707" pitchFamily="18" charset="2"/>
+              <a:buChar char=""/>
+              <a:defRPr kumimoji="1" sz="1200" kern="1200">
+                <a:solidFill>
+                  <a:schemeClr val="tx2"/>
+                </a:solidFill>
+                <a:latin typeface="+mn-lt"/>
+                <a:ea typeface="+mn-ea"/>
+                <a:cs typeface="+mn-cs"/>
+              </a:defRPr>
+            </a:lvl7pPr>
+            <a:lvl8pPr marL="2500000" indent="-228600" algn="l" defTabSz="457200" rtl="0" eaLnBrk="1" latinLnBrk="0" hangingPunct="1">
+              <a:spcBef>
+                <a:spcPct val="20000"/>
+              </a:spcBef>
+              <a:spcAft>
+                <a:spcPts val="600"/>
+              </a:spcAft>
+              <a:buClr>
+                <a:schemeClr val="accent2"/>
+              </a:buClr>
+              <a:buSzPct val="92000"/>
+              <a:buFont typeface="Wingdings 2" panose="05020102010507070707" pitchFamily="18" charset="2"/>
+              <a:buChar char=""/>
+              <a:defRPr kumimoji="1" sz="1200" kern="1200">
+                <a:solidFill>
+                  <a:schemeClr val="tx2"/>
+                </a:solidFill>
+                <a:latin typeface="+mn-lt"/>
+                <a:ea typeface="+mn-ea"/>
+                <a:cs typeface="+mn-cs"/>
+              </a:defRPr>
+            </a:lvl8pPr>
+            <a:lvl9pPr marL="2800000" indent="-228600" algn="l" defTabSz="457200" rtl="0" eaLnBrk="1" latinLnBrk="0" hangingPunct="1">
+              <a:spcBef>
+                <a:spcPct val="20000"/>
+              </a:spcBef>
+              <a:spcAft>
+                <a:spcPts val="600"/>
+              </a:spcAft>
+              <a:buClr>
+                <a:schemeClr val="accent2"/>
+              </a:buClr>
+              <a:buSzPct val="92000"/>
+              <a:buFont typeface="Wingdings 2" panose="05020102010507070707" pitchFamily="18" charset="2"/>
+              <a:buChar char=""/>
+              <a:defRPr kumimoji="1" sz="1200" kern="1200">
+                <a:solidFill>
+                  <a:schemeClr val="tx2"/>
+                </a:solidFill>
+                <a:latin typeface="+mn-lt"/>
+                <a:ea typeface="+mn-ea"/>
+                <a:cs typeface="+mn-cs"/>
+              </a:defRPr>
+            </a:lvl9pPr>
+          </a:lstStyle>
+          <a:p>
+            <a:pPr marL="0" indent="0">
+              <a:buNone/>
+            </a:pPr>
+            <a:r>
+              <a:rPr lang="en-US" altLang="ja-JP" dirty="0"/>
+              <a:t>Ctrl + C , Ctrl + v</a:t>
+            </a:r>
+          </a:p>
+        </p:txBody>
+      </p:sp>
+    </p:spTree>
+    <p:extLst>
+      <p:ext uri="{BB962C8B-B14F-4D97-AF65-F5344CB8AC3E}">
+        <p14:creationId xmlns:p14="http://schemas.microsoft.com/office/powerpoint/2010/main" val="3695602646"/>
+      </p:ext>
+    </p:extLst>
+  </p:cSld>
+  <p:clrMapOvr>
+    <a:masterClrMapping/>
+  </p:clrMapOvr>
+</p:sld>
+</file>
+
+<file path=ppt/slides/slide22.xml><?xml version="1.0" encoding="utf-8"?>
 <p:sld xmlns:a="http://schemas.openxmlformats.org/drawingml/2006/main" xmlns:r="http://schemas.openxmlformats.org/officeDocument/2006/relationships" xmlns:p="http://schemas.openxmlformats.org/presentationml/2006/main">
   <p:cSld>
     <p:spTree>
@@ -22492,7 +23396,7 @@
           <a:p>
             <a:fld id="{CC057153-B650-4DEB-B370-79DDCFDCE934}" type="slidenum">
               <a:rPr lang="en-US" smtClean="0"/>
-              <a:t>20</a:t>
+              <a:t>21</a:t>
             </a:fld>
             <a:endParaRPr lang="en-US"/>
           </a:p>
@@ -22511,7 +23415,7 @@
 </p:sld>
 </file>
 
-<file path=ppt/slides/slide22.xml><?xml version="1.0" encoding="utf-8"?>
+<file path=ppt/slides/slide23.xml><?xml version="1.0" encoding="utf-8"?>
 <p:sld xmlns:a="http://schemas.openxmlformats.org/drawingml/2006/main" xmlns:r="http://schemas.openxmlformats.org/officeDocument/2006/relationships" xmlns:p="http://schemas.openxmlformats.org/presentationml/2006/main">
   <p:cSld>
     <p:spTree>
@@ -23265,7 +24169,7 @@
           <a:p>
             <a:fld id="{CC057153-B650-4DEB-B370-79DDCFDCE934}" type="slidenum">
               <a:rPr lang="en-US" smtClean="0"/>
-              <a:t>21</a:t>
+              <a:t>22</a:t>
             </a:fld>
             <a:endParaRPr lang="en-US"/>
           </a:p>
@@ -23284,7 +24188,7 @@
 </p:sld>
 </file>
 
-<file path=ppt/slides/slide23.xml><?xml version="1.0" encoding="utf-8"?>
+<file path=ppt/slides/slide24.xml><?xml version="1.0" encoding="utf-8"?>
 <p:sld xmlns:a="http://schemas.openxmlformats.org/drawingml/2006/main" xmlns:r="http://schemas.openxmlformats.org/officeDocument/2006/relationships" xmlns:p="http://schemas.openxmlformats.org/presentationml/2006/main">
   <p:cSld>
     <p:spTree>
@@ -23438,7 +24342,7 @@
           <a:p>
             <a:fld id="{CC057153-B650-4DEB-B370-79DDCFDCE934}" type="slidenum">
               <a:rPr lang="en-US" smtClean="0"/>
-              <a:t>22</a:t>
+              <a:t>23</a:t>
             </a:fld>
             <a:endParaRPr lang="en-US"/>
           </a:p>
